--- a/Smart_Waste_Bin_Presentation.pptx
+++ b/Smart_Waste_Bin_Presentation.pptx
@@ -299,6 +299,13 @@
               <a:schemeClr val="lt1"/>
             </a:fontRef>
           </p:style>
+          <p:txBody>
+            <a:bodyPr/>
+            <a:lstStyle/>
+            <a:p>
+              <a:endParaRPr lang="en-GR"/>
+            </a:p>
+          </p:txBody>
         </p:sp>
         <p:sp>
           <p:nvSpPr>
@@ -364,6 +371,13 @@
               <a:schemeClr val="lt1"/>
             </a:fontRef>
           </p:style>
+          <p:txBody>
+            <a:bodyPr/>
+            <a:lstStyle/>
+            <a:p>
+              <a:endParaRPr lang="en-GR"/>
+            </a:p>
+          </p:txBody>
         </p:sp>
         <p:sp>
           <p:nvSpPr>
@@ -426,6 +440,13 @@
               <a:schemeClr val="lt1"/>
             </a:fontRef>
           </p:style>
+          <p:txBody>
+            <a:bodyPr/>
+            <a:lstStyle/>
+            <a:p>
+              <a:endParaRPr lang="en-GR"/>
+            </a:p>
+          </p:txBody>
         </p:sp>
         <p:sp>
           <p:nvSpPr>
@@ -490,6 +511,13 @@
               <a:schemeClr val="lt1"/>
             </a:fontRef>
           </p:style>
+          <p:txBody>
+            <a:bodyPr/>
+            <a:lstStyle/>
+            <a:p>
+              <a:endParaRPr lang="en-GR"/>
+            </a:p>
+          </p:txBody>
         </p:sp>
         <p:sp>
           <p:nvSpPr>
@@ -557,6 +585,13 @@
               <a:schemeClr val="lt1"/>
             </a:fontRef>
           </p:style>
+          <p:txBody>
+            <a:bodyPr/>
+            <a:lstStyle/>
+            <a:p>
+              <a:endParaRPr lang="en-GR"/>
+            </a:p>
+          </p:txBody>
         </p:sp>
         <p:sp>
           <p:nvSpPr>
@@ -622,6 +657,13 @@
               <a:schemeClr val="lt1"/>
             </a:fontRef>
           </p:style>
+          <p:txBody>
+            <a:bodyPr/>
+            <a:lstStyle/>
+            <a:p>
+              <a:endParaRPr lang="en-GR"/>
+            </a:p>
+          </p:txBody>
         </p:sp>
         <p:sp>
           <p:nvSpPr>
@@ -684,6 +726,13 @@
               <a:schemeClr val="lt1"/>
             </a:fontRef>
           </p:style>
+          <p:txBody>
+            <a:bodyPr/>
+            <a:lstStyle/>
+            <a:p>
+              <a:endParaRPr lang="en-GR"/>
+            </a:p>
+          </p:txBody>
         </p:sp>
         <p:sp>
           <p:nvSpPr>
@@ -747,6 +796,13 @@
               <a:schemeClr val="lt1"/>
             </a:fontRef>
           </p:style>
+          <p:txBody>
+            <a:bodyPr/>
+            <a:lstStyle/>
+            <a:p>
+              <a:endParaRPr lang="en-GR"/>
+            </a:p>
+          </p:txBody>
         </p:sp>
       </p:grpSp>
       <p:sp>
@@ -924,7 +980,7 @@
           <a:p>
             <a:fld id="{5BCAD085-E8A6-8845-BD4E-CB4CCA059FC4}" type="datetimeFigureOut">
               <a:rPr lang="en-US" smtClean="0"/>
-              <a:t>4/25/26</a:t>
+              <a:t>4/26/26</a:t>
             </a:fld>
             <a:endParaRPr lang="en-US"/>
           </a:p>
@@ -1175,7 +1231,7 @@
           <a:p>
             <a:fld id="{5BCAD085-E8A6-8845-BD4E-CB4CCA059FC4}" type="datetimeFigureOut">
               <a:rPr lang="en-US" smtClean="0"/>
-              <a:t>4/25/26</a:t>
+              <a:t>4/26/26</a:t>
             </a:fld>
             <a:endParaRPr lang="en-US"/>
           </a:p>
@@ -1489,7 +1545,7 @@
           <a:p>
             <a:fld id="{5BCAD085-E8A6-8845-BD4E-CB4CCA059FC4}" type="datetimeFigureOut">
               <a:rPr lang="en-US" smtClean="0"/>
-              <a:t>4/25/26</a:t>
+              <a:t>4/26/26</a:t>
             </a:fld>
             <a:endParaRPr lang="en-US"/>
           </a:p>
@@ -1822,7 +1878,7 @@
           <a:p>
             <a:fld id="{5BCAD085-E8A6-8845-BD4E-CB4CCA059FC4}" type="datetimeFigureOut">
               <a:rPr lang="en-US" smtClean="0"/>
-              <a:t>4/25/26</a:t>
+              <a:t>4/26/26</a:t>
             </a:fld>
             <a:endParaRPr lang="en-US"/>
           </a:p>
@@ -2136,7 +2192,7 @@
           <a:p>
             <a:fld id="{5BCAD085-E8A6-8845-BD4E-CB4CCA059FC4}" type="datetimeFigureOut">
               <a:rPr lang="en-US" smtClean="0"/>
-              <a:t>4/25/26</a:t>
+              <a:t>4/26/26</a:t>
             </a:fld>
             <a:endParaRPr lang="en-US"/>
           </a:p>
@@ -2529,7 +2585,7 @@
           <a:p>
             <a:fld id="{5BCAD085-E8A6-8845-BD4E-CB4CCA059FC4}" type="datetimeFigureOut">
               <a:rPr lang="en-US" smtClean="0"/>
-              <a:t>4/25/26</a:t>
+              <a:t>4/26/26</a:t>
             </a:fld>
             <a:endParaRPr lang="en-US"/>
           </a:p>
@@ -2699,7 +2755,7 @@
           <a:p>
             <a:fld id="{5BCAD085-E8A6-8845-BD4E-CB4CCA059FC4}" type="datetimeFigureOut">
               <a:rPr lang="en-US" smtClean="0"/>
-              <a:t>4/25/26</a:t>
+              <a:t>4/26/26</a:t>
             </a:fld>
             <a:endParaRPr lang="en-US"/>
           </a:p>
@@ -2879,7 +2935,7 @@
           <a:p>
             <a:fld id="{5BCAD085-E8A6-8845-BD4E-CB4CCA059FC4}" type="datetimeFigureOut">
               <a:rPr lang="en-US" smtClean="0"/>
-              <a:t>4/25/26</a:t>
+              <a:t>4/26/26</a:t>
             </a:fld>
             <a:endParaRPr lang="en-US"/>
           </a:p>
@@ -3049,7 +3105,7 @@
           <a:p>
             <a:fld id="{5BCAD085-E8A6-8845-BD4E-CB4CCA059FC4}" type="datetimeFigureOut">
               <a:rPr lang="en-US" smtClean="0"/>
-              <a:t>4/25/26</a:t>
+              <a:t>4/26/26</a:t>
             </a:fld>
             <a:endParaRPr lang="en-US"/>
           </a:p>
@@ -3296,7 +3352,7 @@
           <a:p>
             <a:fld id="{5BCAD085-E8A6-8845-BD4E-CB4CCA059FC4}" type="datetimeFigureOut">
               <a:rPr lang="en-US" smtClean="0"/>
-              <a:t>4/25/26</a:t>
+              <a:t>4/26/26</a:t>
             </a:fld>
             <a:endParaRPr lang="en-US"/>
           </a:p>
@@ -3593,7 +3649,7 @@
           <a:p>
             <a:fld id="{5BCAD085-E8A6-8845-BD4E-CB4CCA059FC4}" type="datetimeFigureOut">
               <a:rPr lang="en-US" smtClean="0"/>
-              <a:t>4/25/26</a:t>
+              <a:t>4/26/26</a:t>
             </a:fld>
             <a:endParaRPr lang="en-US"/>
           </a:p>
@@ -3972,7 +4028,7 @@
           <a:p>
             <a:fld id="{5BCAD085-E8A6-8845-BD4E-CB4CCA059FC4}" type="datetimeFigureOut">
               <a:rPr lang="en-US" smtClean="0"/>
-              <a:t>4/25/26</a:t>
+              <a:t>4/26/26</a:t>
             </a:fld>
             <a:endParaRPr lang="en-US"/>
           </a:p>
@@ -4095,7 +4151,7 @@
           <a:p>
             <a:fld id="{5BCAD085-E8A6-8845-BD4E-CB4CCA059FC4}" type="datetimeFigureOut">
               <a:rPr lang="en-US" smtClean="0"/>
-              <a:t>4/25/26</a:t>
+              <a:t>4/26/26</a:t>
             </a:fld>
             <a:endParaRPr lang="en-US"/>
           </a:p>
@@ -4190,7 +4246,7 @@
           <a:p>
             <a:fld id="{5BCAD085-E8A6-8845-BD4E-CB4CCA059FC4}" type="datetimeFigureOut">
               <a:rPr lang="en-US" smtClean="0"/>
-              <a:t>4/25/26</a:t>
+              <a:t>4/26/26</a:t>
             </a:fld>
             <a:endParaRPr lang="en-US"/>
           </a:p>
@@ -4445,7 +4501,7 @@
           <a:p>
             <a:fld id="{5BCAD085-E8A6-8845-BD4E-CB4CCA059FC4}" type="datetimeFigureOut">
               <a:rPr lang="en-US" smtClean="0"/>
-              <a:t>4/25/26</a:t>
+              <a:t>4/26/26</a:t>
             </a:fld>
             <a:endParaRPr lang="en-US"/>
           </a:p>
@@ -4708,7 +4764,7 @@
           <a:p>
             <a:fld id="{5BCAD085-E8A6-8845-BD4E-CB4CCA059FC4}" type="datetimeFigureOut">
               <a:rPr lang="en-US" smtClean="0"/>
-              <a:t>4/25/26</a:t>
+              <a:t>4/26/26</a:t>
             </a:fld>
             <a:endParaRPr lang="en-US"/>
           </a:p>
@@ -4866,6 +4922,13 @@
               <a:schemeClr val="lt1"/>
             </a:fontRef>
           </p:style>
+          <p:txBody>
+            <a:bodyPr/>
+            <a:lstStyle/>
+            <a:p>
+              <a:endParaRPr lang="en-GR"/>
+            </a:p>
+          </p:txBody>
         </p:sp>
         <p:cxnSp>
           <p:nvCxnSpPr>
@@ -5005,6 +5068,13 @@
               <a:schemeClr val="lt1"/>
             </a:fontRef>
           </p:style>
+          <p:txBody>
+            <a:bodyPr/>
+            <a:lstStyle/>
+            <a:p>
+              <a:endParaRPr lang="en-GR"/>
+            </a:p>
+          </p:txBody>
         </p:sp>
         <p:sp>
           <p:nvSpPr>
@@ -5070,6 +5140,13 @@
               <a:schemeClr val="lt1"/>
             </a:fontRef>
           </p:style>
+          <p:txBody>
+            <a:bodyPr/>
+            <a:lstStyle/>
+            <a:p>
+              <a:endParaRPr lang="en-GR"/>
+            </a:p>
+          </p:txBody>
         </p:sp>
         <p:sp>
           <p:nvSpPr>
@@ -5132,6 +5209,13 @@
               <a:schemeClr val="lt1"/>
             </a:fontRef>
           </p:style>
+          <p:txBody>
+            <a:bodyPr/>
+            <a:lstStyle/>
+            <a:p>
+              <a:endParaRPr lang="en-GR"/>
+            </a:p>
+          </p:txBody>
         </p:sp>
         <p:sp>
           <p:nvSpPr>
@@ -5196,6 +5280,13 @@
               <a:schemeClr val="lt1"/>
             </a:fontRef>
           </p:style>
+          <p:txBody>
+            <a:bodyPr/>
+            <a:lstStyle/>
+            <a:p>
+              <a:endParaRPr lang="en-GR"/>
+            </a:p>
+          </p:txBody>
         </p:sp>
         <p:sp>
           <p:nvSpPr>
@@ -5263,6 +5354,13 @@
               <a:schemeClr val="lt1"/>
             </a:fontRef>
           </p:style>
+          <p:txBody>
+            <a:bodyPr/>
+            <a:lstStyle/>
+            <a:p>
+              <a:endParaRPr lang="en-GR"/>
+            </a:p>
+          </p:txBody>
         </p:sp>
         <p:sp>
           <p:nvSpPr>
@@ -5328,6 +5426,13 @@
               <a:schemeClr val="lt1"/>
             </a:fontRef>
           </p:style>
+          <p:txBody>
+            <a:bodyPr/>
+            <a:lstStyle/>
+            <a:p>
+              <a:endParaRPr lang="en-GR"/>
+            </a:p>
+          </p:txBody>
         </p:sp>
         <p:sp>
           <p:nvSpPr>
@@ -5390,6 +5495,13 @@
               <a:schemeClr val="lt1"/>
             </a:fontRef>
           </p:style>
+          <p:txBody>
+            <a:bodyPr/>
+            <a:lstStyle/>
+            <a:p>
+              <a:endParaRPr lang="en-GR"/>
+            </a:p>
+          </p:txBody>
         </p:sp>
       </p:grpSp>
       <p:sp>
@@ -5522,7 +5634,7 @@
           <a:p>
             <a:fld id="{5BCAD085-E8A6-8845-BD4E-CB4CCA059FC4}" type="datetimeFigureOut">
               <a:rPr lang="en-US" smtClean="0"/>
-              <a:t>4/25/26</a:t>
+              <a:t>4/26/26</a:t>
             </a:fld>
             <a:endParaRPr lang="en-US"/>
           </a:p>
@@ -6159,8 +6271,8 @@
         </p:nvSpPr>
         <p:spPr>
           <a:xfrm>
-            <a:off x="4035422" y="4050833"/>
-            <a:ext cx="2920080" cy="1096899"/>
+            <a:off x="3805881" y="4050833"/>
+            <a:ext cx="3149621" cy="1096899"/>
           </a:xfrm>
         </p:spPr>
         <p:txBody>
@@ -6175,7 +6287,7 @@
               </a:lnSpc>
             </a:pPr>
             <a:r>
-              <a:rPr lang="en-GB" sz="1050" b="1" u="sng" dirty="0">
+              <a:rPr lang="en-GB" sz="1200" b="1" u="sng" dirty="0">
                 <a:solidFill>
                   <a:schemeClr val="tx1"/>
                 </a:solidFill>
@@ -6190,7 +6302,7 @@
               </a:lnSpc>
             </a:pPr>
             <a:r>
-              <a:rPr lang="en-GB" sz="1050" b="1" dirty="0">
+              <a:rPr lang="en-GB" sz="1200" b="1" dirty="0">
                 <a:solidFill>
                   <a:schemeClr val="tx1"/>
                 </a:solidFill>
@@ -6205,7 +6317,7 @@
               </a:lnSpc>
             </a:pPr>
             <a:r>
-              <a:rPr lang="en-GB" sz="1050" b="1" dirty="0">
+              <a:rPr lang="en-GB" sz="1200" b="1" dirty="0">
                 <a:solidFill>
                   <a:schemeClr val="tx1"/>
                 </a:solidFill>
@@ -6220,7 +6332,7 @@
               </a:lnSpc>
             </a:pPr>
             <a:r>
-              <a:rPr lang="en-GB" sz="1050" b="1" dirty="0">
+              <a:rPr lang="en-GB" sz="1200" b="1" dirty="0">
                 <a:solidFill>
                   <a:schemeClr val="tx1"/>
                 </a:solidFill>
@@ -6287,23 +6399,17 @@
             <p:ph idx="1"/>
           </p:nvPr>
         </p:nvSpPr>
-        <p:spPr/>
-        <p:txBody>
-          <a:bodyPr/>
-          <a:lstStyle/>
-          <a:p>
-            <a:r>
-              <a:rPr dirty="0"/>
-              <a:t>The Problem</a:t>
-            </a:r>
-          </a:p>
-          <a:p>
-            <a:pPr lvl="1"/>
-            <a:r>
-              <a:rPr dirty="0"/>
-              <a:t>Inefficient waste management in university and public buildings leads to overflowing bins and unnecessary cleaning routes.</a:t>
-            </a:r>
-          </a:p>
+        <p:spPr>
+          <a:xfrm>
+            <a:off x="609599" y="1359243"/>
+            <a:ext cx="6347714" cy="5239265"/>
+          </a:xfrm>
+        </p:spPr>
+        <p:txBody>
+          <a:bodyPr>
+            <a:normAutofit/>
+          </a:bodyPr>
+          <a:lstStyle/>
           <a:p>
             <a:r>
               <a:rPr dirty="0"/>
@@ -6313,22 +6419,120 @@
           <a:p>
             <a:pPr lvl="1"/>
             <a:r>
-              <a:rPr dirty="0"/>
-              <a:t>A 'Smart Waste Bin' system that is monitored in real-time.</a:t>
-            </a:r>
-          </a:p>
-          <a:p>
-            <a:r>
-              <a:rPr dirty="0"/>
-              <a:t>The Solution</a:t>
+              <a:rPr lang="en-US" dirty="0"/>
+              <a:t>We want to create a Smart Waste Bin system that is monitored in real-time. </a:t>
             </a:r>
           </a:p>
           <a:p>
             <a:pPr lvl="1"/>
             <a:r>
-              <a:rPr dirty="0"/>
-              <a:t>Using Passive Infrared (PIR) motion sensors to record bin usage and transmitting this data via IoT protocols to a central monitoring Dashboard.</a:t>
-            </a:r>
+              <a:rPr lang="en-US" dirty="0"/>
+              <a:t>It will help with the problems of overflowing bins and unnecessary cleaning routes, because it offers waste management.</a:t>
+            </a:r>
+            <a:endParaRPr lang="en-GR" dirty="0"/>
+          </a:p>
+          <a:p>
+            <a:r>
+              <a:rPr lang="en-GR" dirty="0"/>
+              <a:t>Hardware Setup</a:t>
+            </a:r>
+          </a:p>
+          <a:p>
+            <a:pPr lvl="1"/>
+            <a:r>
+              <a:rPr lang="en-GB" dirty="0"/>
+              <a:t>PIR Sensor (HC-SR501)</a:t>
+            </a:r>
+          </a:p>
+          <a:p>
+            <a:pPr lvl="1"/>
+            <a:r>
+              <a:rPr lang="en-GB" dirty="0"/>
+              <a:t>Raspberry Pi 5</a:t>
+            </a:r>
+          </a:p>
+          <a:p>
+            <a:pPr lvl="1"/>
+            <a:r>
+              <a:rPr lang="en-GB" dirty="0"/>
+              <a:t>Waste Bin</a:t>
+            </a:r>
+          </a:p>
+          <a:p>
+            <a:r>
+              <a:rPr lang="en-GR" dirty="0"/>
+              <a:t>Wiring</a:t>
+            </a:r>
+          </a:p>
+          <a:p>
+            <a:pPr lvl="1"/>
+            <a:r>
+              <a:rPr lang="en-GB" b="1" dirty="0"/>
+              <a:t>VCC:</a:t>
+            </a:r>
+            <a:r>
+              <a:rPr lang="en-GB" dirty="0"/>
+              <a:t> Connected to </a:t>
+            </a:r>
+            <a:r>
+              <a:rPr lang="en-GB" b="1" dirty="0"/>
+              <a:t>5V</a:t>
+            </a:r>
+            <a:r>
+              <a:rPr lang="en-GB" dirty="0"/>
+              <a:t> (Physical Pin 2)</a:t>
+            </a:r>
+          </a:p>
+          <a:p>
+            <a:pPr lvl="1"/>
+            <a:r>
+              <a:rPr lang="en-GB" b="1" dirty="0"/>
+              <a:t>GND:</a:t>
+            </a:r>
+            <a:r>
+              <a:rPr lang="en-GB" dirty="0"/>
+              <a:t> Connected to </a:t>
+            </a:r>
+            <a:r>
+              <a:rPr lang="en-GB" b="1" dirty="0"/>
+              <a:t>GND</a:t>
+            </a:r>
+            <a:r>
+              <a:rPr lang="en-GB" dirty="0"/>
+              <a:t> (Physical Pin 6)</a:t>
+            </a:r>
+          </a:p>
+          <a:p>
+            <a:pPr lvl="1"/>
+            <a:r>
+              <a:rPr lang="en-GB" b="1" dirty="0"/>
+              <a:t>OUT:</a:t>
+            </a:r>
+            <a:r>
+              <a:rPr lang="en-GB" dirty="0"/>
+              <a:t> Connected to </a:t>
+            </a:r>
+            <a:r>
+              <a:rPr lang="en-GB" b="1" dirty="0"/>
+              <a:t>GPIO </a:t>
+            </a:r>
+            <a:r>
+              <a:rPr lang="en-GB" b="1"/>
+              <a:t>18 </a:t>
+            </a:r>
+            <a:r>
+              <a:rPr lang="en-GB"/>
+              <a:t>(</a:t>
+            </a:r>
+            <a:r>
+              <a:rPr lang="en-GB" dirty="0"/>
+              <a:t>Physical </a:t>
+            </a:r>
+            <a:r>
+              <a:rPr lang="en-GB"/>
+              <a:t>Pin 12)</a:t>
+            </a:r>
+            <a:endParaRPr lang="en-GB" dirty="0"/>
           </a:p>
         </p:txBody>
       </p:sp>
